--- a/neerlandais1/powerpoints/Module_32_Even_voorstellen.pptx
+++ b/neerlandais1/powerpoints/Module_32_Even_voorstellen.pptx
@@ -135,18 +135,18 @@
   <p:extLst>
     <p:ext uri="{521415D9-36F7-43E2-AB2F-B90AF26B5E84}">
       <p14:sectionLst xmlns:p14="http://schemas.microsoft.com/office/powerpoint/2010/main">
-        <p14:section name="Ouverture" id="{548ca8cc-4d1d-8050-551d-37384560c67f}">
+        <p14:section name="Ouverture" id="{7731a5c1-933c-2c96-b052-2eefacef94fa}">
           <p14:sldIdLst>
             <p14:sldId id="256"/>
           </p14:sldIdLst>
         </p14:section>
-        <p14:section name="Découvrir" id="{b7458846-bfaa-bb85-d945-27e8b3b9c94b}">
+        <p14:section name="Découvrir" id="{65e2babc-7380-f59b-27e6-b984f38aa791}">
           <p14:sldIdLst>
             <p14:sldId id="257"/>
             <p14:sldId id="258"/>
           </p14:sldIdLst>
         </p14:section>
-        <p14:section name="Comprendre" id="{dd9258f6-002f-9c1e-f7dd-094225299221}">
+        <p14:section name="Comprendre" id="{b6676dcc-9c24-f2e1-6771-0c198e5519d2}">
           <p14:sldIdLst>
             <p14:sldId id="259"/>
             <p14:sldId id="260"/>
@@ -162,7 +162,7 @@
             <p14:sldId id="270"/>
           </p14:sldIdLst>
         </p14:section>
-        <p14:section name="JIJ NU ! — Oefeningen" id="{7d207c87-545a-9794-aac1-0da510e97faa}">
+        <p14:section name="JIJ NU ! — Oefeningen" id="{b4c16e93-4028-9040-d45b-94d0d9fda960}">
           <p14:sldIdLst>
             <p14:sldId id="271"/>
             <p14:sldId id="272"/>
@@ -179,7 +179,7 @@
             <p14:sldId id="283"/>
           </p14:sldIdLst>
         </p14:section>
-        <p14:section name="Clôture" id="{0bb104fa-0d6c-9d0d-4826-a70b780385c4}">
+        <p14:section name="Clôture" id="{9a0f5b6d-a161-ae40-894a-ef948f4d3516}">
           <p14:sldIdLst>
             <p14:sldId id="284"/>
           </p14:sldIdLst>

--- a/neerlandais1/powerpoints/Module_32_Even_voorstellen.pptx
+++ b/neerlandais1/powerpoints/Module_32_Even_voorstellen.pptx
@@ -135,18 +135,18 @@
   <p:extLst>
     <p:ext uri="{521415D9-36F7-43E2-AB2F-B90AF26B5E84}">
       <p14:sectionLst xmlns:p14="http://schemas.microsoft.com/office/powerpoint/2010/main">
-        <p14:section name="Ouverture" id="{7731a5c1-933c-2c96-b052-2eefacef94fa}">
+        <p14:section name="Ouverture" id="{d95eafd7-0248-1995-ad3f-72609608b81f}">
           <p14:sldIdLst>
             <p14:sldId id="256"/>
           </p14:sldIdLst>
         </p14:section>
-        <p14:section name="Découvrir" id="{65e2babc-7380-f59b-27e6-b984f38aa791}">
+        <p14:section name="Découvrir" id="{cf60ee2f-094f-f96f-ff68-11f2be5b71e2}">
           <p14:sldIdLst>
             <p14:sldId id="257"/>
             <p14:sldId id="258"/>
           </p14:sldIdLst>
         </p14:section>
-        <p14:section name="Comprendre" id="{b6676dcc-9c24-f2e1-6771-0c198e5519d2}">
+        <p14:section name="Comprendre" id="{b52b1557-ce5c-d6b6-7aae-8230a007c92e}">
           <p14:sldIdLst>
             <p14:sldId id="259"/>
             <p14:sldId id="260"/>
@@ -162,7 +162,7 @@
             <p14:sldId id="270"/>
           </p14:sldIdLst>
         </p14:section>
-        <p14:section name="JIJ NU ! — Oefeningen" id="{b4c16e93-4028-9040-d45b-94d0d9fda960}">
+        <p14:section name="JIJ NU ! — Oefeningen" id="{dae6d0c1-a54e-5419-a77d-0204820bb1d9}">
           <p14:sldIdLst>
             <p14:sldId id="271"/>
             <p14:sldId id="272"/>
@@ -179,7 +179,7 @@
             <p14:sldId id="283"/>
           </p14:sldIdLst>
         </p14:section>
-        <p14:section name="Clôture" id="{9a0f5b6d-a161-ae40-894a-ef948f4d3516}">
+        <p14:section name="Clôture" id="{c57f2898-644b-1d2b-d7f3-4f7df84e3dce}">
           <p14:sldIdLst>
             <p14:sldId id="284"/>
           </p14:sldIdLst>

--- a/neerlandais1/powerpoints/Module_32_Even_voorstellen.pptx
+++ b/neerlandais1/powerpoints/Module_32_Even_voorstellen.pptx
@@ -135,18 +135,18 @@
   <p:extLst>
     <p:ext uri="{521415D9-36F7-43E2-AB2F-B90AF26B5E84}">
       <p14:sectionLst xmlns:p14="http://schemas.microsoft.com/office/powerpoint/2010/main">
-        <p14:section name="Ouverture" id="{d95eafd7-0248-1995-ad3f-72609608b81f}">
+        <p14:section name="Ouverture" id="{3e1b4b1c-5f76-dbed-b0f2-ff0ab2044413}">
           <p14:sldIdLst>
             <p14:sldId id="256"/>
           </p14:sldIdLst>
         </p14:section>
-        <p14:section name="Découvrir" id="{cf60ee2f-094f-f96f-ff68-11f2be5b71e2}">
+        <p14:section name="Découvrir" id="{23e3b856-ddac-d61d-c7ee-b40cad652834}">
           <p14:sldIdLst>
             <p14:sldId id="257"/>
             <p14:sldId id="258"/>
           </p14:sldIdLst>
         </p14:section>
-        <p14:section name="Comprendre" id="{b52b1557-ce5c-d6b6-7aae-8230a007c92e}">
+        <p14:section name="Comprendre" id="{74425e1a-19e7-c8af-95eb-5f47920aa36c}">
           <p14:sldIdLst>
             <p14:sldId id="259"/>
             <p14:sldId id="260"/>
@@ -162,7 +162,7 @@
             <p14:sldId id="270"/>
           </p14:sldIdLst>
         </p14:section>
-        <p14:section name="JIJ NU ! — Oefeningen" id="{dae6d0c1-a54e-5419-a77d-0204820bb1d9}">
+        <p14:section name="JIJ NU ! — Oefeningen" id="{7631f06a-6e36-22bb-1a35-2c38a77e9af5}">
           <p14:sldIdLst>
             <p14:sldId id="271"/>
             <p14:sldId id="272"/>
@@ -179,7 +179,7 @@
             <p14:sldId id="283"/>
           </p14:sldIdLst>
         </p14:section>
-        <p14:section name="Clôture" id="{c57f2898-644b-1d2b-d7f3-4f7df84e3dce}">
+        <p14:section name="Clôture" id="{af0cc078-65af-99d4-a7e8-3903290f23ee}">
           <p14:sldIdLst>
             <p14:sldId id="284"/>
           </p14:sldIdLst>

--- a/neerlandais1/powerpoints/Module_32_Even_voorstellen.pptx
+++ b/neerlandais1/powerpoints/Module_32_Even_voorstellen.pptx
@@ -135,18 +135,18 @@
   <p:extLst>
     <p:ext uri="{521415D9-36F7-43E2-AB2F-B90AF26B5E84}">
       <p14:sectionLst xmlns:p14="http://schemas.microsoft.com/office/powerpoint/2010/main">
-        <p14:section name="Ouverture" id="{3e1b4b1c-5f76-dbed-b0f2-ff0ab2044413}">
+        <p14:section name="Ouverture" id="{ac50b942-b4a7-259e-e270-44b0e52af863}">
           <p14:sldIdLst>
             <p14:sldId id="256"/>
           </p14:sldIdLst>
         </p14:section>
-        <p14:section name="Découvrir" id="{23e3b856-ddac-d61d-c7ee-b40cad652834}">
+        <p14:section name="Découvrir" id="{06047f7f-b90f-e9d9-5c54-6a17586e1d45}">
           <p14:sldIdLst>
             <p14:sldId id="257"/>
             <p14:sldId id="258"/>
           </p14:sldIdLst>
         </p14:section>
-        <p14:section name="Comprendre" id="{74425e1a-19e7-c8af-95eb-5f47920aa36c}">
+        <p14:section name="Comprendre" id="{8d278325-bfd4-ea25-4b74-049b413e8da4}">
           <p14:sldIdLst>
             <p14:sldId id="259"/>
             <p14:sldId id="260"/>
@@ -162,7 +162,7 @@
             <p14:sldId id="270"/>
           </p14:sldIdLst>
         </p14:section>
-        <p14:section name="JIJ NU ! — Oefeningen" id="{7631f06a-6e36-22bb-1a35-2c38a77e9af5}">
+        <p14:section name="JIJ NU ! — Oefeningen" id="{a4fac1f1-d0ca-245c-c235-40acfa7e864c}">
           <p14:sldIdLst>
             <p14:sldId id="271"/>
             <p14:sldId id="272"/>
@@ -179,7 +179,7 @@
             <p14:sldId id="283"/>
           </p14:sldIdLst>
         </p14:section>
-        <p14:section name="Clôture" id="{af0cc078-65af-99d4-a7e8-3903290f23ee}">
+        <p14:section name="Clôture" id="{c3110e2c-fa6a-109e-810c-40a8ed34b352}">
           <p14:sldIdLst>
             <p14:sldId id="284"/>
           </p14:sldIdLst>

--- a/neerlandais1/powerpoints/Module_32_Even_voorstellen.pptx
+++ b/neerlandais1/powerpoints/Module_32_Even_voorstellen.pptx
@@ -135,18 +135,18 @@
   <p:extLst>
     <p:ext uri="{521415D9-36F7-43E2-AB2F-B90AF26B5E84}">
       <p14:sectionLst xmlns:p14="http://schemas.microsoft.com/office/powerpoint/2010/main">
-        <p14:section name="Ouverture" id="{ac50b942-b4a7-259e-e270-44b0e52af863}">
+        <p14:section name="Ouverture" id="{e409e0b8-488e-99a8-2f81-0bb39c440a1e}">
           <p14:sldIdLst>
             <p14:sldId id="256"/>
           </p14:sldIdLst>
         </p14:section>
-        <p14:section name="Découvrir" id="{06047f7f-b90f-e9d9-5c54-6a17586e1d45}">
+        <p14:section name="Découvrir" id="{83decdd0-9798-0cdf-9721-54c51d52aaf4}">
           <p14:sldIdLst>
             <p14:sldId id="257"/>
             <p14:sldId id="258"/>
           </p14:sldIdLst>
         </p14:section>
-        <p14:section name="Comprendre" id="{8d278325-bfd4-ea25-4b74-049b413e8da4}">
+        <p14:section name="Comprendre" id="{61d84e08-7f89-9424-d444-e877497a78df}">
           <p14:sldIdLst>
             <p14:sldId id="259"/>
             <p14:sldId id="260"/>
@@ -162,7 +162,7 @@
             <p14:sldId id="270"/>
           </p14:sldIdLst>
         </p14:section>
-        <p14:section name="JIJ NU ! — Oefeningen" id="{a4fac1f1-d0ca-245c-c235-40acfa7e864c}">
+        <p14:section name="JIJ NU ! — Oefeningen" id="{3e602ef1-f3c9-fe82-a416-b95d7a949a48}">
           <p14:sldIdLst>
             <p14:sldId id="271"/>
             <p14:sldId id="272"/>
@@ -179,7 +179,7 @@
             <p14:sldId id="283"/>
           </p14:sldIdLst>
         </p14:section>
-        <p14:section name="Clôture" id="{c3110e2c-fa6a-109e-810c-40a8ed34b352}">
+        <p14:section name="Clôture" id="{f52031f4-dbe7-8b59-ed8e-c798ee4a4e62}">
           <p14:sldIdLst>
             <p14:sldId id="284"/>
           </p14:sldIdLst>

--- a/neerlandais1/powerpoints/Module_32_Even_voorstellen.pptx
+++ b/neerlandais1/powerpoints/Module_32_Even_voorstellen.pptx
@@ -135,18 +135,18 @@
   <p:extLst>
     <p:ext uri="{521415D9-36F7-43E2-AB2F-B90AF26B5E84}">
       <p14:sectionLst xmlns:p14="http://schemas.microsoft.com/office/powerpoint/2010/main">
-        <p14:section name="Ouverture" id="{e409e0b8-488e-99a8-2f81-0bb39c440a1e}">
+        <p14:section name="Ouverture" id="{0f8f77a1-18b1-c967-7f67-6f3935b92b58}">
           <p14:sldIdLst>
             <p14:sldId id="256"/>
           </p14:sldIdLst>
         </p14:section>
-        <p14:section name="Découvrir" id="{83decdd0-9798-0cdf-9721-54c51d52aaf4}">
+        <p14:section name="Découvrir" id="{fc30206c-5bf2-61a4-8bd1-dd6369529db4}">
           <p14:sldIdLst>
             <p14:sldId id="257"/>
             <p14:sldId id="258"/>
           </p14:sldIdLst>
         </p14:section>
-        <p14:section name="Comprendre" id="{61d84e08-7f89-9424-d444-e877497a78df}">
+        <p14:section name="Comprendre" id="{315ec3fa-bcec-5ffa-30a4-49fe9608fa26}">
           <p14:sldIdLst>
             <p14:sldId id="259"/>
             <p14:sldId id="260"/>
@@ -162,7 +162,7 @@
             <p14:sldId id="270"/>
           </p14:sldIdLst>
         </p14:section>
-        <p14:section name="JIJ NU ! — Oefeningen" id="{3e602ef1-f3c9-fe82-a416-b95d7a949a48}">
+        <p14:section name="JIJ NU ! — Oefeningen" id="{e848b6de-cb92-607c-4811-7e844258705d}">
           <p14:sldIdLst>
             <p14:sldId id="271"/>
             <p14:sldId id="272"/>
@@ -179,7 +179,7 @@
             <p14:sldId id="283"/>
           </p14:sldIdLst>
         </p14:section>
-        <p14:section name="Clôture" id="{f52031f4-dbe7-8b59-ed8e-c798ee4a4e62}">
+        <p14:section name="Clôture" id="{e70b5503-99b9-6962-9ab3-00f23f0855cc}">
           <p14:sldIdLst>
             <p14:sldId id="284"/>
           </p14:sldIdLst>

--- a/neerlandais1/powerpoints/Module_32_Even_voorstellen.pptx
+++ b/neerlandais1/powerpoints/Module_32_Even_voorstellen.pptx
@@ -135,18 +135,18 @@
   <p:extLst>
     <p:ext uri="{521415D9-36F7-43E2-AB2F-B90AF26B5E84}">
       <p14:sectionLst xmlns:p14="http://schemas.microsoft.com/office/powerpoint/2010/main">
-        <p14:section name="Ouverture" id="{0f8f77a1-18b1-c967-7f67-6f3935b92b58}">
+        <p14:section name="Ouverture" id="{e793b3d2-2ff7-010b-4621-4a7f1d868aad}">
           <p14:sldIdLst>
             <p14:sldId id="256"/>
           </p14:sldIdLst>
         </p14:section>
-        <p14:section name="Découvrir" id="{fc30206c-5bf2-61a4-8bd1-dd6369529db4}">
+        <p14:section name="Découvrir" id="{91619039-762b-7624-03c4-70a738e9f661}">
           <p14:sldIdLst>
             <p14:sldId id="257"/>
             <p14:sldId id="258"/>
           </p14:sldIdLst>
         </p14:section>
-        <p14:section name="Comprendre" id="{315ec3fa-bcec-5ffa-30a4-49fe9608fa26}">
+        <p14:section name="Comprendre" id="{c9d76032-c96d-0c7c-5af9-c30303cd634f}">
           <p14:sldIdLst>
             <p14:sldId id="259"/>
             <p14:sldId id="260"/>
@@ -162,7 +162,7 @@
             <p14:sldId id="270"/>
           </p14:sldIdLst>
         </p14:section>
-        <p14:section name="JIJ NU ! — Oefeningen" id="{e848b6de-cb92-607c-4811-7e844258705d}">
+        <p14:section name="JIJ NU ! — Oefeningen" id="{9668a425-5e1d-4863-e017-dba6c6d7bb2f}">
           <p14:sldIdLst>
             <p14:sldId id="271"/>
             <p14:sldId id="272"/>
@@ -179,7 +179,7 @@
             <p14:sldId id="283"/>
           </p14:sldIdLst>
         </p14:section>
-        <p14:section name="Clôture" id="{e70b5503-99b9-6962-9ab3-00f23f0855cc}">
+        <p14:section name="Clôture" id="{c3557d2e-cc47-0b06-a4c4-857bdee1717d}">
           <p14:sldIdLst>
             <p14:sldId id="284"/>
           </p14:sldIdLst>

--- a/neerlandais1/powerpoints/Module_32_Even_voorstellen.pptx
+++ b/neerlandais1/powerpoints/Module_32_Even_voorstellen.pptx
@@ -135,18 +135,18 @@
   <p:extLst>
     <p:ext uri="{521415D9-36F7-43E2-AB2F-B90AF26B5E84}">
       <p14:sectionLst xmlns:p14="http://schemas.microsoft.com/office/powerpoint/2010/main">
-        <p14:section name="Ouverture" id="{e793b3d2-2ff7-010b-4621-4a7f1d868aad}">
+        <p14:section name="Ouverture" id="{07c2be93-2b82-6d20-72a4-588dbebf70d1}">
           <p14:sldIdLst>
             <p14:sldId id="256"/>
           </p14:sldIdLst>
         </p14:section>
-        <p14:section name="Découvrir" id="{91619039-762b-7624-03c4-70a738e9f661}">
+        <p14:section name="Découvrir" id="{7b32f39a-2353-49f0-b8e8-dfbd8131cffc}">
           <p14:sldIdLst>
             <p14:sldId id="257"/>
             <p14:sldId id="258"/>
           </p14:sldIdLst>
         </p14:section>
-        <p14:section name="Comprendre" id="{c9d76032-c96d-0c7c-5af9-c30303cd634f}">
+        <p14:section name="Comprendre" id="{f97d22e7-5cfd-7a26-974e-a5035672e7bd}">
           <p14:sldIdLst>
             <p14:sldId id="259"/>
             <p14:sldId id="260"/>
@@ -162,7 +162,7 @@
             <p14:sldId id="270"/>
           </p14:sldIdLst>
         </p14:section>
-        <p14:section name="JIJ NU ! — Oefeningen" id="{9668a425-5e1d-4863-e017-dba6c6d7bb2f}">
+        <p14:section name="JIJ NU ! — Oefeningen" id="{bc2516b5-58fb-c3af-4a8c-a56745f169e1}">
           <p14:sldIdLst>
             <p14:sldId id="271"/>
             <p14:sldId id="272"/>
@@ -179,7 +179,7 @@
             <p14:sldId id="283"/>
           </p14:sldIdLst>
         </p14:section>
-        <p14:section name="Clôture" id="{c3557d2e-cc47-0b06-a4c4-857bdee1717d}">
+        <p14:section name="Clôture" id="{4add2cac-a59c-458c-cdfc-9cc237d12706}">
           <p14:sldIdLst>
             <p14:sldId id="284"/>
           </p14:sldIdLst>
